--- a/pr2.pptx
+++ b/pr2.pptx
@@ -8266,19 +8266,19 @@
               <a:buNone/>
             </a:pPr>
             <a:r>
-              <a:rPr lang="ru-RU" sz="5400" b="1" smtClean="0">
+              <a:rPr lang="ru-RU" sz="5400" b="1" dirty="0" smtClean="0">
                 <a:latin typeface="DM Serif Display" panose="020B0604020202020204" charset="0"/>
               </a:rPr>
               <a:t>Сценарий </a:t>
             </a:r>
             <a:r>
-              <a:rPr lang="en-US" sz="5400" b="1" smtClean="0">
+              <a:rPr lang="en-US" sz="5400" b="1" dirty="0" smtClean="0">
                 <a:latin typeface="DM Serif Display" panose="020B0604020202020204" charset="0"/>
               </a:rPr>
               <a:t>6</a:t>
             </a:r>
             <a:r>
-              <a:rPr lang="ru-RU" sz="5400" b="1" smtClean="0">
+              <a:rPr lang="ru-RU" sz="5400" b="1" dirty="0" smtClean="0">
                 <a:latin typeface="DM Serif Display" panose="020B0604020202020204" charset="0"/>
               </a:rPr>
               <a:t>.Просмотр пароля</a:t>
@@ -8984,61 +8984,61 @@
               <a:t>Результат</a:t>
             </a:r>
             <a:r>
-              <a:rPr lang="en-US" sz="2800" b="1" smtClean="0">
+              <a:rPr lang="en-US" sz="2800" b="1" dirty="0" smtClean="0">
                 <a:latin typeface="DM Serif Display" panose="020B0604020202020204" charset="0"/>
               </a:rPr>
               <a:t>: </a:t>
             </a:r>
             <a:r>
-              <a:rPr lang="ru-RU" sz="2800" b="1" smtClean="0">
+              <a:rPr lang="ru-RU" sz="2800" b="1" dirty="0" smtClean="0">
                 <a:latin typeface="DM Serif Display" panose="020B0604020202020204" charset="0"/>
               </a:rPr>
               <a:t>После нажатия кнопки </a:t>
             </a:r>
             <a:r>
-              <a:rPr lang="en-US" sz="2800" b="1" smtClean="0">
+              <a:rPr lang="en-US" sz="2800" b="1" dirty="0" smtClean="0">
                 <a:latin typeface="DM Serif Display" panose="020B0604020202020204" charset="0"/>
               </a:rPr>
               <a:t>“</a:t>
             </a:r>
             <a:r>
-              <a:rPr lang="ru-RU" sz="2800" b="1" smtClean="0">
+              <a:rPr lang="ru-RU" sz="2800" b="1" dirty="0" smtClean="0">
                 <a:latin typeface="DM Serif Display" panose="020B0604020202020204" charset="0"/>
               </a:rPr>
               <a:t>Скрыть</a:t>
             </a:r>
             <a:r>
-              <a:rPr lang="en-US" sz="2800" b="1" smtClean="0">
+              <a:rPr lang="en-US" sz="2800" b="1" dirty="0" smtClean="0">
                 <a:latin typeface="DM Serif Display" panose="020B0604020202020204" charset="0"/>
               </a:rPr>
               <a:t>”</a:t>
             </a:r>
             <a:r>
-              <a:rPr lang="ru-RU" sz="2800" b="1" smtClean="0">
+              <a:rPr lang="ru-RU" sz="2800" b="1" dirty="0" smtClean="0">
                 <a:latin typeface="DM Serif Display" panose="020B0604020202020204" charset="0"/>
               </a:rPr>
               <a:t> пароль, который находится в списке паролей скрывает, а при нажатии кнопки</a:t>
             </a:r>
             <a:r>
-              <a:rPr lang="en-US" sz="2800" b="1" smtClean="0">
+              <a:rPr lang="en-US" sz="2800" b="1" dirty="0" smtClean="0">
                 <a:latin typeface="DM Serif Display" panose="020B0604020202020204" charset="0"/>
               </a:rPr>
               <a:t> “</a:t>
             </a:r>
             <a:r>
-              <a:rPr lang="ru-RU" sz="2800" b="1" smtClean="0">
+              <a:rPr lang="ru-RU" sz="2800" b="1" dirty="0" smtClean="0">
                 <a:latin typeface="DM Serif Display" panose="020B0604020202020204" charset="0"/>
               </a:rPr>
               <a:t>Показать</a:t>
             </a:r>
             <a:r>
-              <a:rPr lang="en-US" sz="2800" b="1" smtClean="0">
+              <a:rPr lang="en-US" sz="2800" b="1" dirty="0" smtClean="0">
                 <a:latin typeface="DM Serif Display" panose="020B0604020202020204" charset="0"/>
               </a:rPr>
               <a:t>” </a:t>
             </a:r>
             <a:r>
-              <a:rPr lang="ru-RU" sz="2800" b="1" smtClean="0">
+              <a:rPr lang="ru-RU" sz="2800" b="1" dirty="0" smtClean="0">
                 <a:latin typeface="DM Serif Display" panose="020B0604020202020204" charset="0"/>
               </a:rPr>
               <a:t>показывается </a:t>
